--- a/lectures/Lecture 1.1 - Software Engineering.pptx
+++ b/lectures/Lecture 1.1 - Software Engineering.pptx
@@ -847,7 +847,7 @@
             </a:pPr>
             <a:r>
               <a:rPr lang="en-US"/>
-              <a:t>Welcome to Software Engineering! This is a project-based course that layers an SE toolkit atop their programming fundamentals.</a:t>
+              <a:t>Welcome! It's project-based, and the whole idea is that we're layering an SE toolkit on top of the programming they already know how to do.</a:t>
             </a:r>
             <a:endParaRPr/>
           </a:p>
@@ -1005,7 +1005,7 @@
             </a:pPr>
             <a:r>
               <a:rPr lang="en-US"/>
-              <a:t>The key progression is autonomy: chatbots answer, agents act, coding agents act specifically on code. Students will use coding agents throughout this course.</a:t>
+              <a:t>What separates these is how much rope you hand it - a chatbot just answers you, an agent can go off and actually do things in a loop, and a coding agent is that same loop pointed at a codebase. They'll be living in the third one all semester.</a:t>
             </a:r>
             <a:endParaRPr/>
           </a:p>
@@ -1163,7 +1163,7 @@
             </a:pPr>
             <a:r>
               <a:rPr lang="en-US"/>
-              <a:t>Emphasize that agents are a tool, not a crutch. Students who understand what the code does will outperform students who blindly accept agent output.</a:t>
+              <a:t>Push on this one. The students who can tell you what their code actually does are gonna run circles around the ones who just take whatever came out of the agent, and since the exams are conceptual that shows up pretty fast.</a:t>
             </a:r>
             <a:endParaRPr/>
           </a:p>
@@ -1321,7 +1321,7 @@
             </a:pPr>
             <a:r>
               <a:rPr lang="en-US"/>
-              <a:t>Emphasize that agents are a tool, not a crutch. Students who understand what the code does will outperform students who blindly accept agent output.</a:t>
+              <a:t>Push on this one. The students who can tell you what their code actually does are gonna run circles around the ones who just take whatever came out of the agent, and since the exams are conceptual that shows up pretty fast.</a:t>
             </a:r>
             <a:endParaRPr/>
           </a:p>
@@ -1479,7 +1479,7 @@
             </a:pPr>
             <a:r>
               <a:rPr lang="en-US"/>
-              <a:t>Emphasize that agents are a tool, not a crutch. Students who understand what the code does will outperform students who blindly accept agent output.</a:t>
+              <a:t>Push on this one. The students who can tell you what their code actually does are gonna run circles around the ones who just take whatever came out of the agent, and since the exams are conceptual that shows up pretty fast.</a:t>
             </a:r>
             <a:endParaRPr/>
           </a:p>
@@ -1637,7 +1637,7 @@
             </a:pPr>
             <a:r>
               <a:rPr lang="en-US"/>
-              <a:t>Emphasize that agents are a tool, not a crutch. Students who understand what the code does will outperform students who blindly accept agent output.</a:t>
+              <a:t>Push on this one. The students who can tell you what their code actually does are gonna run circles around the ones who just take whatever came out of the agent, and since the exams are conceptual that shows up pretty fast.</a:t>
             </a:r>
             <a:endParaRPr/>
           </a:p>
@@ -1795,7 +1795,7 @@
             </a:pPr>
             <a:r>
               <a:rPr lang="en-US"/>
-              <a:t>Emphasize that agents are a tool, not a crutch. Students who understand what the code does will outperform students who blindly accept agent output.</a:t>
+              <a:t>Push on this one. The students who can tell you what their code actually does are gonna run circles around the ones who just take whatever came out of the agent, and since the exams are conceptual that shows up pretty fast.</a:t>
             </a:r>
             <a:endParaRPr/>
           </a:p>
@@ -1953,7 +1953,7 @@
             </a:pPr>
             <a:r>
               <a:rPr lang="en-US"/>
-              <a:t>Emphasize that agents are a tool, not a crutch. Students who understand what the code does will outperform students who blindly accept agent output.</a:t>
+              <a:t>Push on this one. The students who can tell you what their code actually does are gonna run circles around the ones who just take whatever came out of the agent, and since the exams are conceptual that shows up pretty fast.</a:t>
             </a:r>
             <a:endParaRPr/>
           </a:p>
@@ -2111,7 +2111,7 @@
             </a:pPr>
             <a:r>
               <a:rPr lang="en-US"/>
-              <a:t>Emphasize that agents are a tool, not a crutch. Students who understand what the code does will outperform students who blindly accept agent output.</a:t>
+              <a:t>Push on this one. The students who can tell you what their code actually does are gonna run circles around the ones who just take whatever came out of the agent, and since the exams are conceptual that shows up pretty fast.</a:t>
             </a:r>
             <a:endParaRPr/>
           </a:p>
@@ -2269,7 +2269,7 @@
             </a:pPr>
             <a:r>
               <a:rPr lang="en-US"/>
-              <a:t>Emphasize that agents are a tool, not a crutch. Students who understand what the code does will outperform students who blindly accept agent output.</a:t>
+              <a:t>Push on this one. The students who can tell you what their code actually does are gonna run circles around the ones who just take whatever came out of the agent, and since the exams are conceptual that shows up pretty fast.</a:t>
             </a:r>
             <a:endParaRPr/>
           </a:p>
@@ -2427,7 +2427,7 @@
             </a:pPr>
             <a:r>
               <a:rPr lang="en-US"/>
-              <a:t>Emphasize that agents are a tool, not a crutch. Students who understand what the code does will outperform students who blindly accept agent output.</a:t>
+              <a:t>Push on this one. The students who can tell you what their code actually does are gonna run circles around the ones who just take whatever came out of the agent, and since the exams are conceptual that shows up pretty fast.</a:t>
             </a:r>
             <a:endParaRPr/>
           </a:p>
@@ -2585,7 +2585,7 @@
             </a:pPr>
             <a:r>
               <a:rPr lang="en-US"/>
-              <a:t>Set expectations: this course moves fast and covers a lot of ground. LLM usage is not just allowed - it's encouraged.</a:t>
+              <a:t>Set expectations early, because this thing moves fast and covers a LOT of ground. And I want them using LLMs the whole way through, out in the open, not sneaking around with them.</a:t>
             </a:r>
             <a:endParaRPr/>
           </a:p>
@@ -2743,7 +2743,7 @@
             </a:pPr>
             <a:r>
               <a:rPr lang="en-US"/>
-              <a:t>Emphasize that agents are a tool, not a crutch. Students who understand what the code does will outperform students who blindly accept agent output.</a:t>
+              <a:t>Push on this one. The students who can tell you what their code actually does are gonna run circles around the ones who just take whatever came out of the agent, and since the exams are conceptual that shows up pretty fast.</a:t>
             </a:r>
             <a:endParaRPr/>
           </a:p>
@@ -2901,7 +2901,7 @@
             </a:pPr>
             <a:r>
               <a:rPr lang="en-US"/>
-              <a:t>Emphasize that agents are a tool, not a crutch. Students who understand what the code does will outperform students who blindly accept agent output.</a:t>
+              <a:t>Push on this one. The students who can tell you what their code actually does are gonna run circles around the ones who just take whatever came out of the agent, and since the exams are conceptual that shows up pretty fast.</a:t>
             </a:r>
             <a:endParaRPr/>
           </a:p>
@@ -3059,7 +3059,7 @@
             </a:pPr>
             <a:r>
               <a:rPr lang="en-US"/>
-              <a:t>This is the core mental model for the entire course.</a:t>
+              <a:t>Core mental model. Everything after this hangs off it.</a:t>
             </a:r>
             <a:endParaRPr/>
           </a:p>
@@ -3217,7 +3217,7 @@
             </a:pPr>
             <a:r>
               <a:rPr lang="en-US"/>
-              <a:t>Walk through each layer: client (browser), server (Python), database, and how they communicate. This diagram is the roadmap for the entire course.</a:t>
+              <a:t>Walk each layer - browser up top, Python server in the middle, database at the bottom - and then spend a minute on the arrows, because the arrows are the part they haven't seen before.</a:t>
             </a:r>
             <a:endParaRPr/>
           </a:p>
@@ -5501,7 +5501,7 @@
             </a:pPr>
             <a:r>
               <a:rPr lang="en-US"/>
-              <a:t>This is the roadmap. Individual assignments in weeks 1-6 scaffold the chat app. Week 7+ is the open-ended team project.</a:t>
+              <a:t>Roadmap slide. Weeks 1-6 they build the chat app piece by piece on their own, then week 7 they pair up (or trio up) and it goes open-ended.</a:t>
             </a:r>
             <a:endParaRPr/>
           </a:p>
@@ -5971,7 +5971,7 @@
             </a:pPr>
             <a:r>
               <a:rPr lang="en-US"/>
-              <a:t>The key progression is autonomy: chatbots answer, agents act, coding agents act specifically on code. Students will use coding agents throughout this course.</a:t>
+              <a:t>What separates these is how much rope you hand it - a chatbot just answers you, an agent can go off and actually do things in a loop, and a coding agent is that same loop pointed at a codebase. They'll be living in the third one all semester.</a:t>
             </a:r>
             <a:endParaRPr/>
           </a:p>
@@ -6129,7 +6129,7 @@
             </a:pPr>
             <a:r>
               <a:rPr lang="en-US"/>
-              <a:t>The key progression is autonomy: chatbots answer, agents act, coding agents act specifically on code. Students will use coding agents throughout this course.</a:t>
+              <a:t>What separates these is how much rope you hand it - a chatbot just answers you, an agent can go off and actually do things in a loop, and a coding agent is that same loop pointed at a codebase. They'll be living in the third one all semester.</a:t>
             </a:r>
             <a:endParaRPr/>
           </a:p>

--- a/lectures/Lecture 1.1 - Software Engineering.pptx
+++ b/lectures/Lecture 1.1 - Software Engineering.pptx
@@ -835,22 +835,7 @@
             <a:noAutofit/>
           </a:bodyPr>
           <a:lstStyle/>
-          <a:p>
-            <a:pPr marL="0" lvl="0" indent="0" algn="l" rtl="0">
-              <a:spcBef>
-                <a:spcPts val="0"/>
-              </a:spcBef>
-              <a:spcAft>
-                <a:spcPts val="0"/>
-              </a:spcAft>
-              <a:buNone/>
-            </a:pPr>
-            <a:r>
-              <a:rPr lang="en-US"/>
-              <a:t>Welcome! It's project-based, and the whole idea is that we're layering an SE toolkit on top of the programming they already know how to do.</a:t>
-            </a:r>
-            <a:endParaRPr/>
-          </a:p>
+          <a:p/>
         </p:txBody>
       </p:sp>
       <p:sp>
@@ -994,20 +979,9 @@
           </a:bodyPr>
           <a:lstStyle/>
           <a:p>
-            <a:pPr marL="0" lvl="0" indent="0" algn="l" rtl="0">
-              <a:spcBef>
-                <a:spcPts val="0"/>
-              </a:spcBef>
-              <a:spcAft>
-                <a:spcPts val="0"/>
-              </a:spcAft>
-              <a:buNone/>
-            </a:pPr>
-            <a:r>
-              <a:rPr lang="en-US"/>
-              <a:t>What separates these is how much rope you hand it - a chatbot just answers you, an agent can go off and actually do things in a loop, and a coding agent is that same loop pointed at a codebase. They'll be living in the third one all semester.</a:t>
-            </a:r>
-            <a:endParaRPr/>
+            <a:r>
+              <a:t>They'll use coding agents all semester.</a:t>
+            </a:r>
           </a:p>
         </p:txBody>
       </p:sp>
@@ -1152,20 +1126,9 @@
           </a:bodyPr>
           <a:lstStyle/>
           <a:p>
-            <a:pPr marL="0" lvl="0" indent="0" algn="l" rtl="0">
-              <a:spcBef>
-                <a:spcPts val="0"/>
-              </a:spcBef>
-              <a:spcAft>
-                <a:spcPts val="0"/>
-              </a:spcAft>
-              <a:buNone/>
-            </a:pPr>
-            <a:r>
-              <a:rPr lang="en-US"/>
-              <a:t>Push on this one. The students who can tell you what their code actually does are gonna run circles around the ones who just take whatever came out of the agent, and since the exams are conceptual that shows up pretty fast.</a:t>
-            </a:r>
-            <a:endParaRPr/>
+            <a:r>
+              <a:t>Exams are conceptual; they need to explain what their code does.</a:t>
+            </a:r>
           </a:p>
         </p:txBody>
       </p:sp>
@@ -1310,20 +1273,9 @@
           </a:bodyPr>
           <a:lstStyle/>
           <a:p>
-            <a:pPr marL="0" lvl="0" indent="0" algn="l" rtl="0">
-              <a:spcBef>
-                <a:spcPts val="0"/>
-              </a:spcBef>
-              <a:spcAft>
-                <a:spcPts val="0"/>
-              </a:spcAft>
-              <a:buNone/>
-            </a:pPr>
-            <a:r>
-              <a:rPr lang="en-US"/>
-              <a:t>Push on this one. The students who can tell you what their code actually does are gonna run circles around the ones who just take whatever came out of the agent, and since the exams are conceptual that shows up pretty fast.</a:t>
-            </a:r>
-            <a:endParaRPr/>
+            <a:r>
+              <a:t>Exams are conceptual; they need to explain what their code does.</a:t>
+            </a:r>
           </a:p>
         </p:txBody>
       </p:sp>
@@ -1468,20 +1420,9 @@
           </a:bodyPr>
           <a:lstStyle/>
           <a:p>
-            <a:pPr marL="0" lvl="0" indent="0" algn="l" rtl="0">
-              <a:spcBef>
-                <a:spcPts val="0"/>
-              </a:spcBef>
-              <a:spcAft>
-                <a:spcPts val="0"/>
-              </a:spcAft>
-              <a:buNone/>
-            </a:pPr>
-            <a:r>
-              <a:rPr lang="en-US"/>
-              <a:t>Push on this one. The students who can tell you what their code actually does are gonna run circles around the ones who just take whatever came out of the agent, and since the exams are conceptual that shows up pretty fast.</a:t>
-            </a:r>
-            <a:endParaRPr/>
+            <a:r>
+              <a:t>Exams are conceptual; they need to explain what their code does.</a:t>
+            </a:r>
           </a:p>
         </p:txBody>
       </p:sp>
@@ -1626,20 +1567,9 @@
           </a:bodyPr>
           <a:lstStyle/>
           <a:p>
-            <a:pPr marL="0" lvl="0" indent="0" algn="l" rtl="0">
-              <a:spcBef>
-                <a:spcPts val="0"/>
-              </a:spcBef>
-              <a:spcAft>
-                <a:spcPts val="0"/>
-              </a:spcAft>
-              <a:buNone/>
-            </a:pPr>
-            <a:r>
-              <a:rPr lang="en-US"/>
-              <a:t>Push on this one. The students who can tell you what their code actually does are gonna run circles around the ones who just take whatever came out of the agent, and since the exams are conceptual that shows up pretty fast.</a:t>
-            </a:r>
-            <a:endParaRPr/>
+            <a:r>
+              <a:t>Exams are conceptual; they need to explain what their code does.</a:t>
+            </a:r>
           </a:p>
         </p:txBody>
       </p:sp>
@@ -1784,20 +1714,9 @@
           </a:bodyPr>
           <a:lstStyle/>
           <a:p>
-            <a:pPr marL="0" lvl="0" indent="0" algn="l" rtl="0">
-              <a:spcBef>
-                <a:spcPts val="0"/>
-              </a:spcBef>
-              <a:spcAft>
-                <a:spcPts val="0"/>
-              </a:spcAft>
-              <a:buNone/>
-            </a:pPr>
-            <a:r>
-              <a:rPr lang="en-US"/>
-              <a:t>Push on this one. The students who can tell you what their code actually does are gonna run circles around the ones who just take whatever came out of the agent, and since the exams are conceptual that shows up pretty fast.</a:t>
-            </a:r>
-            <a:endParaRPr/>
+            <a:r>
+              <a:t>Exams are conceptual; they need to explain what their code does.</a:t>
+            </a:r>
           </a:p>
         </p:txBody>
       </p:sp>
@@ -1942,20 +1861,9 @@
           </a:bodyPr>
           <a:lstStyle/>
           <a:p>
-            <a:pPr marL="0" lvl="0" indent="0" algn="l" rtl="0">
-              <a:spcBef>
-                <a:spcPts val="0"/>
-              </a:spcBef>
-              <a:spcAft>
-                <a:spcPts val="0"/>
-              </a:spcAft>
-              <a:buNone/>
-            </a:pPr>
-            <a:r>
-              <a:rPr lang="en-US"/>
-              <a:t>Push on this one. The students who can tell you what their code actually does are gonna run circles around the ones who just take whatever came out of the agent, and since the exams are conceptual that shows up pretty fast.</a:t>
-            </a:r>
-            <a:endParaRPr/>
+            <a:r>
+              <a:t>Exams are conceptual; they need to explain what their code does.</a:t>
+            </a:r>
           </a:p>
         </p:txBody>
       </p:sp>
@@ -2100,20 +2008,9 @@
           </a:bodyPr>
           <a:lstStyle/>
           <a:p>
-            <a:pPr marL="0" lvl="0" indent="0" algn="l" rtl="0">
-              <a:spcBef>
-                <a:spcPts val="0"/>
-              </a:spcBef>
-              <a:spcAft>
-                <a:spcPts val="0"/>
-              </a:spcAft>
-              <a:buNone/>
-            </a:pPr>
-            <a:r>
-              <a:rPr lang="en-US"/>
-              <a:t>Push on this one. The students who can tell you what their code actually does are gonna run circles around the ones who just take whatever came out of the agent, and since the exams are conceptual that shows up pretty fast.</a:t>
-            </a:r>
-            <a:endParaRPr/>
+            <a:r>
+              <a:t>Exams are conceptual; they need to explain what their code does.</a:t>
+            </a:r>
           </a:p>
         </p:txBody>
       </p:sp>
@@ -2258,20 +2155,9 @@
           </a:bodyPr>
           <a:lstStyle/>
           <a:p>
-            <a:pPr marL="0" lvl="0" indent="0" algn="l" rtl="0">
-              <a:spcBef>
-                <a:spcPts val="0"/>
-              </a:spcBef>
-              <a:spcAft>
-                <a:spcPts val="0"/>
-              </a:spcAft>
-              <a:buNone/>
-            </a:pPr>
-            <a:r>
-              <a:rPr lang="en-US"/>
-              <a:t>Push on this one. The students who can tell you what their code actually does are gonna run circles around the ones who just take whatever came out of the agent, and since the exams are conceptual that shows up pretty fast.</a:t>
-            </a:r>
-            <a:endParaRPr/>
+            <a:r>
+              <a:t>Exams are conceptual; they need to explain what their code does.</a:t>
+            </a:r>
           </a:p>
         </p:txBody>
       </p:sp>
@@ -2416,20 +2302,9 @@
           </a:bodyPr>
           <a:lstStyle/>
           <a:p>
-            <a:pPr marL="0" lvl="0" indent="0" algn="l" rtl="0">
-              <a:spcBef>
-                <a:spcPts val="0"/>
-              </a:spcBef>
-              <a:spcAft>
-                <a:spcPts val="0"/>
-              </a:spcAft>
-              <a:buNone/>
-            </a:pPr>
-            <a:r>
-              <a:rPr lang="en-US"/>
-              <a:t>Push on this one. The students who can tell you what their code actually does are gonna run circles around the ones who just take whatever came out of the agent, and since the exams are conceptual that shows up pretty fast.</a:t>
-            </a:r>
-            <a:endParaRPr/>
+            <a:r>
+              <a:t>Exams are conceptual; they need to explain what their code does.</a:t>
+            </a:r>
           </a:p>
         </p:txBody>
       </p:sp>
@@ -2574,20 +2449,9 @@
           </a:bodyPr>
           <a:lstStyle/>
           <a:p>
-            <a:pPr marL="0" lvl="0" indent="0" algn="l" rtl="0">
-              <a:spcBef>
-                <a:spcPts val="0"/>
-              </a:spcBef>
-              <a:spcAft>
-                <a:spcPts val="0"/>
-              </a:spcAft>
-              <a:buNone/>
-            </a:pPr>
-            <a:r>
-              <a:rPr lang="en-US"/>
-              <a:t>Set expectations early, because this thing moves fast and covers a LOT of ground. And I want them using LLMs the whole way through, out in the open, not sneaking around with them.</a:t>
-            </a:r>
-            <a:endParaRPr/>
+            <a:r>
+              <a:t>Fast pace. LLM use is expected and out in the open.</a:t>
+            </a:r>
           </a:p>
         </p:txBody>
       </p:sp>
@@ -2732,20 +2596,9 @@
           </a:bodyPr>
           <a:lstStyle/>
           <a:p>
-            <a:pPr marL="0" lvl="0" indent="0" algn="l" rtl="0">
-              <a:spcBef>
-                <a:spcPts val="0"/>
-              </a:spcBef>
-              <a:spcAft>
-                <a:spcPts val="0"/>
-              </a:spcAft>
-              <a:buNone/>
-            </a:pPr>
-            <a:r>
-              <a:rPr lang="en-US"/>
-              <a:t>Push on this one. The students who can tell you what their code actually does are gonna run circles around the ones who just take whatever came out of the agent, and since the exams are conceptual that shows up pretty fast.</a:t>
-            </a:r>
-            <a:endParaRPr/>
+            <a:r>
+              <a:t>Exams are conceptual; they need to explain what their code does.</a:t>
+            </a:r>
           </a:p>
         </p:txBody>
       </p:sp>
@@ -2890,20 +2743,9 @@
           </a:bodyPr>
           <a:lstStyle/>
           <a:p>
-            <a:pPr marL="0" lvl="0" indent="0" algn="l" rtl="0">
-              <a:spcBef>
-                <a:spcPts val="0"/>
-              </a:spcBef>
-              <a:spcAft>
-                <a:spcPts val="0"/>
-              </a:spcAft>
-              <a:buNone/>
-            </a:pPr>
-            <a:r>
-              <a:rPr lang="en-US"/>
-              <a:t>Push on this one. The students who can tell you what their code actually does are gonna run circles around the ones who just take whatever came out of the agent, and since the exams are conceptual that shows up pretty fast.</a:t>
-            </a:r>
-            <a:endParaRPr/>
+            <a:r>
+              <a:t>Exams are conceptual; they need to explain what their code does.</a:t>
+            </a:r>
           </a:p>
         </p:txBody>
       </p:sp>
@@ -3048,20 +2890,9 @@
           </a:bodyPr>
           <a:lstStyle/>
           <a:p>
-            <a:pPr marL="0" lvl="0" indent="0" algn="l" rtl="0">
-              <a:spcBef>
-                <a:spcPts val="0"/>
-              </a:spcBef>
-              <a:spcAft>
-                <a:spcPts val="0"/>
-              </a:spcAft>
-              <a:buNone/>
-            </a:pPr>
-            <a:r>
-              <a:rPr lang="en-US"/>
-              <a:t>Core mental model. Everything after this hangs off it.</a:t>
-            </a:r>
-            <a:endParaRPr/>
+            <a:r>
+              <a:t>Core mental model for the rest of the course.</a:t>
+            </a:r>
           </a:p>
         </p:txBody>
       </p:sp>
@@ -3206,20 +3037,9 @@
           </a:bodyPr>
           <a:lstStyle/>
           <a:p>
-            <a:pPr marL="0" lvl="0" indent="0" algn="l" rtl="0">
-              <a:spcBef>
-                <a:spcPts val="0"/>
-              </a:spcBef>
-              <a:spcAft>
-                <a:spcPts val="0"/>
-              </a:spcAft>
-              <a:buNone/>
-            </a:pPr>
-            <a:r>
-              <a:rPr lang="en-US"/>
-              <a:t>Walk each layer - browser up top, Python server in the middle, database at the bottom - and then spend a minute on the arrows, because the arrows are the part they haven't seen before.</a:t>
-            </a:r>
-            <a:endParaRPr/>
+            <a:r>
+              <a:t>Walk each layer top to bottom, then spend a minute on the arrows.</a:t>
+            </a:r>
           </a:p>
         </p:txBody>
       </p:sp>
@@ -5490,20 +5310,9 @@
           </a:bodyPr>
           <a:lstStyle/>
           <a:p>
-            <a:pPr marL="0" lvl="0" indent="0" algn="l" rtl="0">
-              <a:spcBef>
-                <a:spcPts val="0"/>
-              </a:spcBef>
-              <a:spcAft>
-                <a:spcPts val="0"/>
-              </a:spcAft>
-              <a:buNone/>
-            </a:pPr>
-            <a:r>
-              <a:rPr lang="en-US"/>
-              <a:t>Roadmap slide. Weeks 1-6 they build the chat app piece by piece on their own, then week 7 they pair up (or trio up) and it goes open-ended.</a:t>
-            </a:r>
-            <a:endParaRPr/>
+            <a:r>
+              <a:t>Weeks 1-6 build the chat app solo; week 7 pairs/trios, open-ended.</a:t>
+            </a:r>
           </a:p>
         </p:txBody>
       </p:sp>
@@ -5960,20 +5769,9 @@
           </a:bodyPr>
           <a:lstStyle/>
           <a:p>
-            <a:pPr marL="0" lvl="0" indent="0" algn="l" rtl="0">
-              <a:spcBef>
-                <a:spcPts val="0"/>
-              </a:spcBef>
-              <a:spcAft>
-                <a:spcPts val="0"/>
-              </a:spcAft>
-              <a:buNone/>
-            </a:pPr>
-            <a:r>
-              <a:rPr lang="en-US"/>
-              <a:t>What separates these is how much rope you hand it - a chatbot just answers you, an agent can go off and actually do things in a loop, and a coding agent is that same loop pointed at a codebase. They'll be living in the third one all semester.</a:t>
-            </a:r>
-            <a:endParaRPr/>
+            <a:r>
+              <a:t>They'll use coding agents all semester.</a:t>
+            </a:r>
           </a:p>
         </p:txBody>
       </p:sp>
@@ -6118,20 +5916,9 @@
           </a:bodyPr>
           <a:lstStyle/>
           <a:p>
-            <a:pPr marL="0" lvl="0" indent="0" algn="l" rtl="0">
-              <a:spcBef>
-                <a:spcPts val="0"/>
-              </a:spcBef>
-              <a:spcAft>
-                <a:spcPts val="0"/>
-              </a:spcAft>
-              <a:buNone/>
-            </a:pPr>
-            <a:r>
-              <a:rPr lang="en-US"/>
-              <a:t>What separates these is how much rope you hand it - a chatbot just answers you, an agent can go off and actually do things in a loop, and a coding agent is that same loop pointed at a codebase. They'll be living in the third one all semester.</a:t>
-            </a:r>
-            <a:endParaRPr/>
+            <a:r>
+              <a:t>They'll use coding agents all semester.</a:t>
+            </a:r>
           </a:p>
         </p:txBody>
       </p:sp>
